--- a/CalendarioAgo26/presentaciones/18_Expresiones_regulares.pptx
+++ b/CalendarioAgo26/presentaciones/18_Expresiones_regulares.pptx
@@ -178,7 +178,7 @@
 <file path=ppt/revisionInfo.xml><?xml version="1.0" encoding="utf-8"?>
 <p1510:revInfo xmlns:a="http://schemas.openxmlformats.org/drawingml/2006/main" xmlns:r="http://schemas.openxmlformats.org/officeDocument/2006/relationships" xmlns:p1510="http://schemas.microsoft.com/office/powerpoint/2015/10/main">
   <p1510:revLst>
-    <p1510:client id="{094E4236-C942-4953-B32E-0149FEEC4E2E}" v="1" dt="2026-03-03T21:58:02.115"/>
+    <p1510:client id="{F11244E6-25D3-48DC-A0B2-97179955C57B}" v="1" dt="2026-08-11T16:25:08.618"/>
   </p1510:revLst>
 </p1510:revInfo>
 </file>
@@ -188,128 +188,22 @@
   <pc:docChgLst>
     <pc:chgData name="Lizethe Pérez Fuertes" userId="4ae9ef87-2a7d-42f8-8dfa-0a501a9e2ff4" providerId="ADAL" clId="{FDDD45CB-1330-4033-A842-3D2746AFF7C7}"/>
     <pc:docChg chg="undo redo custSel addSld delSld modSld">
-      <pc:chgData name="Lizethe Pérez Fuertes" userId="4ae9ef87-2a7d-42f8-8dfa-0a501a9e2ff4" providerId="ADAL" clId="{FDDD45CB-1330-4033-A842-3D2746AFF7C7}" dt="2026-03-03T21:58:48.704" v="751" actId="113"/>
+      <pc:chgData name="Lizethe Pérez Fuertes" userId="4ae9ef87-2a7d-42f8-8dfa-0a501a9e2ff4" providerId="ADAL" clId="{FDDD45CB-1330-4033-A842-3D2746AFF7C7}" dt="2026-08-11T16:25:08.618" v="752"/>
       <pc:docMkLst>
         <pc:docMk/>
       </pc:docMkLst>
-      <pc:sldChg chg="modSp mod">
-        <pc:chgData name="Lizethe Pérez Fuertes" userId="4ae9ef87-2a7d-42f8-8dfa-0a501a9e2ff4" providerId="ADAL" clId="{FDDD45CB-1330-4033-A842-3D2746AFF7C7}" dt="2026-03-03T21:21:55.193" v="686" actId="20577"/>
+      <pc:sldChg chg="modSp">
+        <pc:chgData name="Lizethe Pérez Fuertes" userId="4ae9ef87-2a7d-42f8-8dfa-0a501a9e2ff4" providerId="ADAL" clId="{FDDD45CB-1330-4033-A842-3D2746AFF7C7}" dt="2026-08-11T16:25:08.618" v="752"/>
         <pc:sldMkLst>
           <pc:docMk/>
-          <pc:sldMk cId="3176738947" sldId="676"/>
+          <pc:sldMk cId="542782376" sldId="293"/>
         </pc:sldMkLst>
         <pc:spChg chg="mod">
-          <ac:chgData name="Lizethe Pérez Fuertes" userId="4ae9ef87-2a7d-42f8-8dfa-0a501a9e2ff4" providerId="ADAL" clId="{FDDD45CB-1330-4033-A842-3D2746AFF7C7}" dt="2026-03-03T21:21:55.193" v="686" actId="20577"/>
+          <ac:chgData name="Lizethe Pérez Fuertes" userId="4ae9ef87-2a7d-42f8-8dfa-0a501a9e2ff4" providerId="ADAL" clId="{FDDD45CB-1330-4033-A842-3D2746AFF7C7}" dt="2026-08-11T16:25:08.618" v="752"/>
           <ac:spMkLst>
             <pc:docMk/>
-            <pc:sldMk cId="3176738947" sldId="676"/>
-            <ac:spMk id="9" creationId="{E1C784F4-BDDC-4D50-B8E9-68B91761F76A}"/>
-          </ac:spMkLst>
-        </pc:spChg>
-      </pc:sldChg>
-      <pc:sldChg chg="modSp mod">
-        <pc:chgData name="Lizethe Pérez Fuertes" userId="4ae9ef87-2a7d-42f8-8dfa-0a501a9e2ff4" providerId="ADAL" clId="{FDDD45CB-1330-4033-A842-3D2746AFF7C7}" dt="2026-03-03T21:29:13.991" v="725" actId="113"/>
-        <pc:sldMkLst>
-          <pc:docMk/>
-          <pc:sldMk cId="2265507875" sldId="677"/>
-        </pc:sldMkLst>
-        <pc:spChg chg="mod">
-          <ac:chgData name="Lizethe Pérez Fuertes" userId="4ae9ef87-2a7d-42f8-8dfa-0a501a9e2ff4" providerId="ADAL" clId="{FDDD45CB-1330-4033-A842-3D2746AFF7C7}" dt="2026-03-03T21:29:13.991" v="725" actId="113"/>
-          <ac:spMkLst>
-            <pc:docMk/>
-            <pc:sldMk cId="2265507875" sldId="677"/>
-            <ac:spMk id="6" creationId="{7B04CF3A-CFE2-489B-A399-BF52B6C4C715}"/>
-          </ac:spMkLst>
-        </pc:spChg>
-      </pc:sldChg>
-      <pc:sldChg chg="addSp delSp modSp mod">
-        <pc:chgData name="Lizethe Pérez Fuertes" userId="4ae9ef87-2a7d-42f8-8dfa-0a501a9e2ff4" providerId="ADAL" clId="{FDDD45CB-1330-4033-A842-3D2746AFF7C7}" dt="2026-03-03T21:26:09.472" v="722" actId="113"/>
-        <pc:sldMkLst>
-          <pc:docMk/>
-          <pc:sldMk cId="946192398" sldId="697"/>
-        </pc:sldMkLst>
-        <pc:spChg chg="mod">
-          <ac:chgData name="Lizethe Pérez Fuertes" userId="4ae9ef87-2a7d-42f8-8dfa-0a501a9e2ff4" providerId="ADAL" clId="{FDDD45CB-1330-4033-A842-3D2746AFF7C7}" dt="2026-03-03T21:26:09.472" v="722" actId="113"/>
-          <ac:spMkLst>
-            <pc:docMk/>
-            <pc:sldMk cId="946192398" sldId="697"/>
-            <ac:spMk id="9" creationId="{E1C784F4-BDDC-4D50-B8E9-68B91761F76A}"/>
-          </ac:spMkLst>
-        </pc:spChg>
-        <pc:picChg chg="del">
-          <ac:chgData name="Lizethe Pérez Fuertes" userId="4ae9ef87-2a7d-42f8-8dfa-0a501a9e2ff4" providerId="ADAL" clId="{FDDD45CB-1330-4033-A842-3D2746AFF7C7}" dt="2026-03-03T21:25:39.867" v="697" actId="478"/>
-          <ac:picMkLst>
-            <pc:docMk/>
-            <pc:sldMk cId="946192398" sldId="697"/>
-            <ac:picMk id="3" creationId="{E871119C-7F00-4F18-B5A8-B63D8C979EE9}"/>
-          </ac:picMkLst>
-        </pc:picChg>
-        <pc:picChg chg="add mod">
-          <ac:chgData name="Lizethe Pérez Fuertes" userId="4ae9ef87-2a7d-42f8-8dfa-0a501a9e2ff4" providerId="ADAL" clId="{FDDD45CB-1330-4033-A842-3D2746AFF7C7}" dt="2026-03-03T21:25:47.212" v="701" actId="1076"/>
-          <ac:picMkLst>
-            <pc:docMk/>
-            <pc:sldMk cId="946192398" sldId="697"/>
-            <ac:picMk id="4" creationId="{962A6C1B-37ED-6724-052E-CE5BEC606AC2}"/>
-          </ac:picMkLst>
-        </pc:picChg>
-      </pc:sldChg>
-      <pc:sldChg chg="del">
-        <pc:chgData name="Lizethe Pérez Fuertes" userId="4ae9ef87-2a7d-42f8-8dfa-0a501a9e2ff4" providerId="ADAL" clId="{FDDD45CB-1330-4033-A842-3D2746AFF7C7}" dt="2026-03-03T21:24:42.892" v="696" actId="47"/>
-        <pc:sldMkLst>
-          <pc:docMk/>
-          <pc:sldMk cId="1474776067" sldId="698"/>
-        </pc:sldMkLst>
-      </pc:sldChg>
-      <pc:sldChg chg="addSp delSp modSp mod">
-        <pc:chgData name="Lizethe Pérez Fuertes" userId="4ae9ef87-2a7d-42f8-8dfa-0a501a9e2ff4" providerId="ADAL" clId="{FDDD45CB-1330-4033-A842-3D2746AFF7C7}" dt="2026-03-03T21:24:09.547" v="695" actId="1076"/>
-        <pc:sldMkLst>
-          <pc:docMk/>
-          <pc:sldMk cId="2849105023" sldId="699"/>
-        </pc:sldMkLst>
-        <pc:picChg chg="add mod">
-          <ac:chgData name="Lizethe Pérez Fuertes" userId="4ae9ef87-2a7d-42f8-8dfa-0a501a9e2ff4" providerId="ADAL" clId="{FDDD45CB-1330-4033-A842-3D2746AFF7C7}" dt="2026-03-03T21:24:09.547" v="695" actId="1076"/>
-          <ac:picMkLst>
-            <pc:docMk/>
-            <pc:sldMk cId="2849105023" sldId="699"/>
-            <ac:picMk id="3" creationId="{514A6828-6F08-192B-9770-F2E3E2BA265F}"/>
-          </ac:picMkLst>
-        </pc:picChg>
-        <pc:picChg chg="add del">
-          <ac:chgData name="Lizethe Pérez Fuertes" userId="4ae9ef87-2a7d-42f8-8dfa-0a501a9e2ff4" providerId="ADAL" clId="{FDDD45CB-1330-4033-A842-3D2746AFF7C7}" dt="2026-03-03T21:23:58.405" v="689" actId="478"/>
-          <ac:picMkLst>
-            <pc:docMk/>
-            <pc:sldMk cId="2849105023" sldId="699"/>
-            <ac:picMk id="8" creationId="{58F906D6-ACE3-4DD9-BB99-D80454EBFEEA}"/>
-          </ac:picMkLst>
-        </pc:picChg>
-      </pc:sldChg>
-      <pc:sldChg chg="modSp mod">
-        <pc:chgData name="Lizethe Pérez Fuertes" userId="4ae9ef87-2a7d-42f8-8dfa-0a501a9e2ff4" providerId="ADAL" clId="{FDDD45CB-1330-4033-A842-3D2746AFF7C7}" dt="2026-03-03T21:58:48.704" v="751" actId="113"/>
-        <pc:sldMkLst>
-          <pc:docMk/>
-          <pc:sldMk cId="1919744961" sldId="732"/>
-        </pc:sldMkLst>
-        <pc:spChg chg="mod">
-          <ac:chgData name="Lizethe Pérez Fuertes" userId="4ae9ef87-2a7d-42f8-8dfa-0a501a9e2ff4" providerId="ADAL" clId="{FDDD45CB-1330-4033-A842-3D2746AFF7C7}" dt="2026-03-03T21:58:48.704" v="751" actId="113"/>
-          <ac:spMkLst>
-            <pc:docMk/>
-            <pc:sldMk cId="1919744961" sldId="732"/>
-            <ac:spMk id="3" creationId="{731A6801-6C8C-D007-4366-6A294226C510}"/>
-          </ac:spMkLst>
-        </pc:spChg>
-      </pc:sldChg>
-      <pc:sldChg chg="modSp mod">
-        <pc:chgData name="Lizethe Pérez Fuertes" userId="4ae9ef87-2a7d-42f8-8dfa-0a501a9e2ff4" providerId="ADAL" clId="{FDDD45CB-1330-4033-A842-3D2746AFF7C7}" dt="2026-03-03T21:51:36.062" v="729" actId="20577"/>
-        <pc:sldMkLst>
-          <pc:docMk/>
-          <pc:sldMk cId="1212743794" sldId="733"/>
-        </pc:sldMkLst>
-        <pc:spChg chg="mod">
-          <ac:chgData name="Lizethe Pérez Fuertes" userId="4ae9ef87-2a7d-42f8-8dfa-0a501a9e2ff4" providerId="ADAL" clId="{FDDD45CB-1330-4033-A842-3D2746AFF7C7}" dt="2026-03-03T21:51:36.062" v="729" actId="20577"/>
-          <ac:spMkLst>
-            <pc:docMk/>
-            <pc:sldMk cId="1212743794" sldId="733"/>
-            <ac:spMk id="5" creationId="{C20582F6-D5EC-1CFC-EB01-59FE60FC7F5E}"/>
+            <pc:sldMk cId="542782376" sldId="293"/>
+            <ac:spMk id="2" creationId="{00000000-0000-0000-0000-000000000000}"/>
           </ac:spMkLst>
         </pc:spChg>
       </pc:sldChg>
@@ -400,7 +294,7 @@
           <a:p>
             <a:fld id="{DDE721D5-655F-45D2-B717-3C4CD78C8568}" type="datetimeFigureOut">
               <a:rPr lang="es-MX" smtClean="0"/>
-              <a:t>03/03/2026</a:t>
+              <a:t>11/08/2026</a:t>
             </a:fld>
             <a:endParaRPr lang="es-MX" dirty="0"/>
           </a:p>
@@ -4953,7 +4847,7 @@
           <a:p>
             <a:fld id="{B3F3E716-CACC-4490-AD07-F24B6A68DE47}" type="datetimeFigureOut">
               <a:rPr lang="es-MX" smtClean="0"/>
-              <a:t>03/03/2026</a:t>
+              <a:t>11/08/2026</a:t>
             </a:fld>
             <a:endParaRPr lang="es-MX" dirty="0"/>
           </a:p>
@@ -5123,7 +5017,7 @@
           <a:p>
             <a:fld id="{B3F3E716-CACC-4490-AD07-F24B6A68DE47}" type="datetimeFigureOut">
               <a:rPr lang="es-MX" smtClean="0"/>
-              <a:t>03/03/2026</a:t>
+              <a:t>11/08/2026</a:t>
             </a:fld>
             <a:endParaRPr lang="es-MX" dirty="0"/>
           </a:p>
@@ -5303,7 +5197,7 @@
           <a:p>
             <a:fld id="{B3F3E716-CACC-4490-AD07-F24B6A68DE47}" type="datetimeFigureOut">
               <a:rPr lang="es-MX" smtClean="0"/>
-              <a:t>03/03/2026</a:t>
+              <a:t>11/08/2026</a:t>
             </a:fld>
             <a:endParaRPr lang="es-MX" dirty="0"/>
           </a:p>
@@ -5456,7 +5350,7 @@
           <a:p>
             <a:fld id="{1D8BD707-D9CF-40AE-B4C6-C98DA3205C09}" type="datetimeFigureOut">
               <a:rPr lang="en-US" smtClean="0"/>
-              <a:t>3/3/2026</a:t>
+              <a:t>8/11/2026</a:t>
             </a:fld>
             <a:endParaRPr lang="en-US" dirty="0"/>
           </a:p>
@@ -5616,7 +5510,7 @@
           <a:p>
             <a:fld id="{B3F3E716-CACC-4490-AD07-F24B6A68DE47}" type="datetimeFigureOut">
               <a:rPr lang="es-MX" smtClean="0"/>
-              <a:t>03/03/2026</a:t>
+              <a:t>11/08/2026</a:t>
             </a:fld>
             <a:endParaRPr lang="es-MX" dirty="0"/>
           </a:p>
@@ -5862,7 +5756,7 @@
           <a:p>
             <a:fld id="{B3F3E716-CACC-4490-AD07-F24B6A68DE47}" type="datetimeFigureOut">
               <a:rPr lang="es-MX" smtClean="0"/>
-              <a:t>03/03/2026</a:t>
+              <a:t>11/08/2026</a:t>
             </a:fld>
             <a:endParaRPr lang="es-MX" dirty="0"/>
           </a:p>
@@ -6150,7 +6044,7 @@
           <a:p>
             <a:fld id="{B3F3E716-CACC-4490-AD07-F24B6A68DE47}" type="datetimeFigureOut">
               <a:rPr lang="es-MX" smtClean="0"/>
-              <a:t>03/03/2026</a:t>
+              <a:t>11/08/2026</a:t>
             </a:fld>
             <a:endParaRPr lang="es-MX" dirty="0"/>
           </a:p>
@@ -6572,7 +6466,7 @@
           <a:p>
             <a:fld id="{B3F3E716-CACC-4490-AD07-F24B6A68DE47}" type="datetimeFigureOut">
               <a:rPr lang="es-MX" smtClean="0"/>
-              <a:t>03/03/2026</a:t>
+              <a:t>11/08/2026</a:t>
             </a:fld>
             <a:endParaRPr lang="es-MX" dirty="0"/>
           </a:p>
@@ -6690,7 +6584,7 @@
           <a:p>
             <a:fld id="{B3F3E716-CACC-4490-AD07-F24B6A68DE47}" type="datetimeFigureOut">
               <a:rPr lang="es-MX" smtClean="0"/>
-              <a:t>03/03/2026</a:t>
+              <a:t>11/08/2026</a:t>
             </a:fld>
             <a:endParaRPr lang="es-MX" dirty="0"/>
           </a:p>
@@ -6785,7 +6679,7 @@
           <a:p>
             <a:fld id="{B3F3E716-CACC-4490-AD07-F24B6A68DE47}" type="datetimeFigureOut">
               <a:rPr lang="es-MX" smtClean="0"/>
-              <a:t>03/03/2026</a:t>
+              <a:t>11/08/2026</a:t>
             </a:fld>
             <a:endParaRPr lang="es-MX" dirty="0"/>
           </a:p>
@@ -7062,7 +6956,7 @@
           <a:p>
             <a:fld id="{B3F3E716-CACC-4490-AD07-F24B6A68DE47}" type="datetimeFigureOut">
               <a:rPr lang="es-MX" smtClean="0"/>
-              <a:t>03/03/2026</a:t>
+              <a:t>11/08/2026</a:t>
             </a:fld>
             <a:endParaRPr lang="es-MX" dirty="0"/>
           </a:p>
@@ -7315,7 +7209,7 @@
           <a:p>
             <a:fld id="{B3F3E716-CACC-4490-AD07-F24B6A68DE47}" type="datetimeFigureOut">
               <a:rPr lang="es-MX" smtClean="0"/>
-              <a:t>03/03/2026</a:t>
+              <a:t>11/08/2026</a:t>
             </a:fld>
             <a:endParaRPr lang="es-MX" dirty="0"/>
           </a:p>
@@ -7528,7 +7422,7 @@
           <a:p>
             <a:fld id="{B3F3E716-CACC-4490-AD07-F24B6A68DE47}" type="datetimeFigureOut">
               <a:rPr lang="es-MX" smtClean="0"/>
-              <a:t>03/03/2026</a:t>
+              <a:t>11/08/2026</a:t>
             </a:fld>
             <a:endParaRPr lang="es-MX" dirty="0"/>
           </a:p>
@@ -7926,21 +7820,18 @@
           </a:bodyPr>
           <a:lstStyle/>
           <a:p>
-            <a:pPr algn="l" eaLnBrk="1" fontAlgn="auto" hangingPunct="1">
-              <a:spcAft>
-                <a:spcPts val="0"/>
-              </a:spcAft>
+            <a:pPr algn="l">
               <a:defRPr/>
             </a:pPr>
             <a:r>
-              <a:rPr lang="es-MX" sz="3200" dirty="0">
+              <a:rPr lang="es-MX" sz="3200">
                 <a:solidFill>
                   <a:schemeClr val="bg2">
                     <a:lumMod val="50000"/>
                   </a:schemeClr>
                 </a:solidFill>
               </a:rPr>
-              <a:t>TI 3001 C</a:t>
+              <a:t>TI 3008 C</a:t>
             </a:r>
             <a:br>
               <a:rPr lang="es-MX" sz="3200" dirty="0">
